--- a/Presentation/QuizArena.pptx
+++ b/Presentation/QuizArena.pptx
@@ -117,6 +117,11 @@
       </a:defRPr>
     </a:lvl9pPr>
   </p:defaultTextStyle>
+  <p:extLst>
+    <p:ext uri="{EFAFB233-063F-42B5-8137-9DF3F51BA10A}">
+      <p15:sldGuideLst xmlns:p15="http://schemas.microsoft.com/office/powerpoint/2012/main"/>
+    </p:ext>
+  </p:extLst>
 </p:presentation>
 </file>
 
@@ -211,7 +216,7 @@
           <a:p>
             <a:fld id="{3B985EC4-34A2-4481-B882-DCBB7B1C39E1}" type="datetimeFigureOut">
               <a:rPr lang="LID4096" smtClean="0"/>
-              <a:t>08/04/2026</a:t>
+              <a:t>08/05/2026</a:t>
             </a:fld>
             <a:endParaRPr lang="LID4096"/>
           </a:p>
@@ -1195,7 +1200,7 @@
             <a:fld id="{B61BEF0D-F0BB-DE4B-95CE-6DB70DBA9567}" type="datetimeFigureOut">
               <a:rPr lang="en-US" smtClean="0"/>
               <a:pPr/>
-              <a:t>8/4/2026</a:t>
+              <a:t>8/5/2026</a:t>
             </a:fld>
             <a:endParaRPr lang="en-US"/>
           </a:p>
@@ -1366,7 +1371,7 @@
             <a:fld id="{B61BEF0D-F0BB-DE4B-95CE-6DB70DBA9567}" type="datetimeFigureOut">
               <a:rPr lang="en-US" smtClean="0"/>
               <a:pPr/>
-              <a:t>8/4/2026</a:t>
+              <a:t>8/5/2026</a:t>
             </a:fld>
             <a:endParaRPr lang="en-US"/>
           </a:p>
@@ -1547,7 +1552,7 @@
             <a:fld id="{B61BEF0D-F0BB-DE4B-95CE-6DB70DBA9567}" type="datetimeFigureOut">
               <a:rPr lang="en-US" smtClean="0"/>
               <a:pPr/>
-              <a:t>8/4/2026</a:t>
+              <a:t>8/5/2026</a:t>
             </a:fld>
             <a:endParaRPr lang="en-US"/>
           </a:p>
@@ -1788,7 +1793,7 @@
             <a:fld id="{B61BEF0D-F0BB-DE4B-95CE-6DB70DBA9567}" type="datetimeFigureOut">
               <a:rPr lang="en-US" smtClean="0"/>
               <a:pPr/>
-              <a:t>8/4/2026</a:t>
+              <a:t>8/5/2026</a:t>
             </a:fld>
             <a:endParaRPr lang="en-US"/>
           </a:p>
@@ -2036,7 +2041,7 @@
             <a:fld id="{B61BEF0D-F0BB-DE4B-95CE-6DB70DBA9567}" type="datetimeFigureOut">
               <a:rPr lang="en-US" smtClean="0"/>
               <a:pPr/>
-              <a:t>8/4/2026</a:t>
+              <a:t>8/5/2026</a:t>
             </a:fld>
             <a:endParaRPr lang="en-US"/>
           </a:p>
@@ -2268,7 +2273,7 @@
             <a:fld id="{B61BEF0D-F0BB-DE4B-95CE-6DB70DBA9567}" type="datetimeFigureOut">
               <a:rPr lang="en-US" smtClean="0"/>
               <a:pPr/>
-              <a:t>8/4/2026</a:t>
+              <a:t>8/5/2026</a:t>
             </a:fld>
             <a:endParaRPr lang="en-US"/>
           </a:p>
@@ -2635,7 +2640,7 @@
             <a:fld id="{B61BEF0D-F0BB-DE4B-95CE-6DB70DBA9567}" type="datetimeFigureOut">
               <a:rPr lang="en-US" smtClean="0"/>
               <a:pPr/>
-              <a:t>8/4/2026</a:t>
+              <a:t>8/5/2026</a:t>
             </a:fld>
             <a:endParaRPr lang="en-US"/>
           </a:p>
@@ -2755,7 +2760,7 @@
             <a:fld id="{B61BEF0D-F0BB-DE4B-95CE-6DB70DBA9567}" type="datetimeFigureOut">
               <a:rPr lang="en-US" smtClean="0"/>
               <a:pPr/>
-              <a:t>8/4/2026</a:t>
+              <a:t>8/5/2026</a:t>
             </a:fld>
             <a:endParaRPr lang="en-US"/>
           </a:p>
@@ -2853,7 +2858,7 @@
             <a:fld id="{B61BEF0D-F0BB-DE4B-95CE-6DB70DBA9567}" type="datetimeFigureOut">
               <a:rPr lang="en-US" smtClean="0"/>
               <a:pPr/>
-              <a:t>8/4/2026</a:t>
+              <a:t>8/5/2026</a:t>
             </a:fld>
             <a:endParaRPr lang="en-US"/>
           </a:p>
@@ -3131,7 +3136,7 @@
             <a:fld id="{B61BEF0D-F0BB-DE4B-95CE-6DB70DBA9567}" type="datetimeFigureOut">
               <a:rPr lang="en-US" smtClean="0"/>
               <a:pPr/>
-              <a:t>8/4/2026</a:t>
+              <a:t>8/5/2026</a:t>
             </a:fld>
             <a:endParaRPr lang="en-US"/>
           </a:p>
@@ -3389,7 +3394,7 @@
             <a:fld id="{B61BEF0D-F0BB-DE4B-95CE-6DB70DBA9567}" type="datetimeFigureOut">
               <a:rPr lang="en-US" smtClean="0"/>
               <a:pPr/>
-              <a:t>8/4/2026</a:t>
+              <a:t>8/5/2026</a:t>
             </a:fld>
             <a:endParaRPr lang="en-US"/>
           </a:p>
@@ -3603,7 +3608,7 @@
             <a:fld id="{B61BEF0D-F0BB-DE4B-95CE-6DB70DBA9567}" type="datetimeFigureOut">
               <a:rPr lang="en-US" smtClean="0"/>
               <a:pPr/>
-              <a:t>8/4/2026</a:t>
+              <a:t>8/5/2026</a:t>
             </a:fld>
             <a:endParaRPr lang="en-US"/>
           </a:p>
@@ -4117,7 +4122,6 @@
                 <a:solidFill>
                   <a:srgbClr val="F7F8FB"/>
                 </a:solidFill>
-                <a:latin typeface="Aptos Display" pitchFamily="34" charset="0"/>
                 <a:ea typeface="Aptos Display" pitchFamily="34" charset="-122"/>
                 <a:cs typeface="Aptos Display" pitchFamily="34" charset="-120"/>
               </a:rPr>
@@ -4254,7 +4258,6 @@
                 <a:solidFill>
                   <a:srgbClr val="F7F8FB"/>
                 </a:solidFill>
-                <a:latin typeface="Cascadia Mono" pitchFamily="34" charset="0"/>
                 <a:ea typeface="Cascadia Mono" pitchFamily="34" charset="-122"/>
                 <a:cs typeface="Cascadia Mono" pitchFamily="34" charset="-120"/>
               </a:rPr>
@@ -4277,7 +4280,6 @@
                 <a:solidFill>
                   <a:srgbClr val="F7F8FB"/>
                 </a:solidFill>
-                <a:latin typeface="Cascadia Mono" pitchFamily="34" charset="0"/>
                 <a:ea typeface="Cascadia Mono" pitchFamily="34" charset="-122"/>
                 <a:cs typeface="Cascadia Mono" pitchFamily="34" charset="-120"/>
               </a:rPr>
@@ -4294,7 +4296,6 @@
                 <a:solidFill>
                   <a:srgbClr val="F7F8FB"/>
                 </a:solidFill>
-                <a:latin typeface="Cascadia Mono" pitchFamily="34" charset="0"/>
                 <a:ea typeface="Cascadia Mono" pitchFamily="34" charset="-122"/>
                 <a:cs typeface="Cascadia Mono" pitchFamily="34" charset="-120"/>
               </a:rPr>
@@ -4311,7 +4312,6 @@
                 <a:solidFill>
                   <a:srgbClr val="F7F8FB"/>
                 </a:solidFill>
-                <a:latin typeface="Cascadia Mono" pitchFamily="34" charset="0"/>
                 <a:ea typeface="Cascadia Mono" pitchFamily="34" charset="-122"/>
                 <a:cs typeface="Cascadia Mono" pitchFamily="34" charset="-120"/>
               </a:rPr>
@@ -4328,7 +4328,6 @@
                 <a:solidFill>
                   <a:srgbClr val="F7F8FB"/>
                 </a:solidFill>
-                <a:latin typeface="Cascadia Mono" pitchFamily="34" charset="0"/>
                 <a:ea typeface="Cascadia Mono" pitchFamily="34" charset="-122"/>
                 <a:cs typeface="Cascadia Mono" pitchFamily="34" charset="-120"/>
               </a:rPr>
@@ -4345,7 +4344,6 @@
                 <a:solidFill>
                   <a:srgbClr val="F7F8FB"/>
                 </a:solidFill>
-                <a:latin typeface="Cascadia Mono" pitchFamily="34" charset="0"/>
                 <a:ea typeface="Cascadia Mono" pitchFamily="34" charset="-122"/>
                 <a:cs typeface="Cascadia Mono" pitchFamily="34" charset="-120"/>
               </a:rPr>
@@ -6220,7 +6218,6 @@
                 <a:solidFill>
                   <a:srgbClr val="F7F8FB"/>
                 </a:solidFill>
-                <a:latin typeface="Aptos Display" pitchFamily="34" charset="0"/>
                 <a:ea typeface="Aptos Display" pitchFamily="34" charset="-122"/>
                 <a:cs typeface="Aptos Display" pitchFamily="34" charset="-120"/>
               </a:rPr>
@@ -6255,14 +6252,14 @@
               <a:buNone/>
             </a:pPr>
             <a:r>
-              <a:rPr lang="en-US" sz="1400" b="1">
+              <a:rPr lang="en-US" sz="1400" b="1" dirty="0">
                 <a:solidFill>
                   <a:srgbClr val="B9C4D1"/>
                 </a:solidFill>
               </a:rPr>
               <a:t>A simple math quiz game with difficulty modes, lives, saving, and a leaderboard.</a:t>
             </a:r>
-            <a:endParaRPr lang="en-US" sz="1400" b="1"/>
+            <a:endParaRPr lang="en-US" sz="1400" b="1" dirty="0"/>
           </a:p>
         </p:txBody>
       </p:sp>
@@ -6786,7 +6783,7 @@
                   <a:srgbClr val="F7F8FB"/>
                 </a:solidFill>
               </a:rPr>
-              <a:t>Correct answer: +10 points</a:t>
+              <a:t>Correct answer: +5 points</a:t>
             </a:r>
             <a:endParaRPr lang="en-US" sz="1400" dirty="0"/>
           </a:p>
@@ -13731,44 +13728,6 @@
       </p:sp>
       <p:sp>
         <p:nvSpPr>
-          <p:cNvPr id="15" name="Text 13"/>
-          <p:cNvSpPr/>
-          <p:nvPr/>
-        </p:nvSpPr>
-        <p:spPr>
-          <a:xfrm>
-            <a:off x="868680" y="4510578"/>
-            <a:ext cx="4160520" cy="822960"/>
-          </a:xfrm>
-          <a:prstGeom prst="rect">
-            <a:avLst/>
-          </a:prstGeom>
-          <a:noFill/>
-          <a:ln/>
-        </p:spPr>
-        <p:txBody>
-          <a:bodyPr wrap="square" lIns="0" tIns="0" rIns="0" bIns="0" rtlCol="0" anchor="ctr">
-            <a:normAutofit/>
-          </a:bodyPr>
-          <a:lstStyle/>
-          <a:p>
-            <a:pPr marL="0" indent="0">
-              <a:buNone/>
-            </a:pPr>
-            <a:r>
-              <a:rPr lang="en-US" sz="1800" b="1" dirty="0">
-                <a:solidFill>
-                  <a:srgbClr val="F7F8FB"/>
-                </a:solidFill>
-              </a:rPr>
-              <a:t>The same game loop can handle multiple question types without checking the exact class.</a:t>
-            </a:r>
-            <a:endParaRPr lang="en-US" sz="1800" dirty="0"/>
-          </a:p>
-        </p:txBody>
-      </p:sp>
-      <p:sp>
-        <p:nvSpPr>
           <p:cNvPr id="17" name="Text 15"/>
           <p:cNvSpPr/>
           <p:nvPr/>
@@ -14760,7 +14719,6 @@
                 <a:solidFill>
                   <a:srgbClr val="F7F8FB"/>
                 </a:solidFill>
-                <a:latin typeface="Aptos Display" pitchFamily="34" charset="0"/>
                 <a:ea typeface="Aptos Display" pitchFamily="34" charset="-122"/>
                 <a:cs typeface="Aptos Display" pitchFamily="34" charset="-120"/>
               </a:rPr>
@@ -14799,7 +14757,6 @@
                 <a:solidFill>
                   <a:srgbClr val="35D0BA"/>
                 </a:solidFill>
-                <a:latin typeface="Aptos Display" pitchFamily="34" charset="0"/>
                 <a:ea typeface="Aptos Display" pitchFamily="34" charset="-122"/>
                 <a:cs typeface="Aptos Display" pitchFamily="34" charset="-120"/>
               </a:rPr>
@@ -14848,7 +14805,6 @@
                 <a:solidFill>
                   <a:srgbClr val="F7F8FB"/>
                 </a:solidFill>
-                <a:latin typeface="Cascadia Mono" pitchFamily="34" charset="0"/>
                 <a:ea typeface="Cascadia Mono" pitchFamily="34" charset="-122"/>
                 <a:cs typeface="Cascadia Mono" pitchFamily="34" charset="-120"/>
               </a:rPr>
@@ -14871,7 +14827,6 @@
                 <a:solidFill>
                   <a:srgbClr val="F7F8FB"/>
                 </a:solidFill>
-                <a:latin typeface="Cascadia Mono" pitchFamily="34" charset="0"/>
                 <a:ea typeface="Cascadia Mono" pitchFamily="34" charset="-122"/>
                 <a:cs typeface="Cascadia Mono" pitchFamily="34" charset="-120"/>
               </a:rPr>
@@ -14888,7 +14843,6 @@
                 <a:solidFill>
                   <a:srgbClr val="F7F8FB"/>
                 </a:solidFill>
-                <a:latin typeface="Cascadia Mono" pitchFamily="34" charset="0"/>
                 <a:ea typeface="Cascadia Mono" pitchFamily="34" charset="-122"/>
                 <a:cs typeface="Cascadia Mono" pitchFamily="34" charset="-120"/>
               </a:rPr>
@@ -14905,7 +14859,6 @@
                 <a:solidFill>
                   <a:srgbClr val="F7F8FB"/>
                 </a:solidFill>
-                <a:latin typeface="Cascadia Mono" pitchFamily="34" charset="0"/>
                 <a:ea typeface="Cascadia Mono" pitchFamily="34" charset="-122"/>
                 <a:cs typeface="Cascadia Mono" pitchFamily="34" charset="-120"/>
               </a:rPr>
@@ -14922,7 +14875,6 @@
                 <a:solidFill>
                   <a:srgbClr val="F7F8FB"/>
                 </a:solidFill>
-                <a:latin typeface="Cascadia Mono" pitchFamily="34" charset="0"/>
                 <a:ea typeface="Cascadia Mono" pitchFamily="34" charset="-122"/>
                 <a:cs typeface="Cascadia Mono" pitchFamily="34" charset="-120"/>
               </a:rPr>
@@ -15395,7 +15347,7 @@
         </p:spPr>
         <p:txBody>
           <a:bodyPr wrap="square" lIns="0" tIns="0" rIns="0" bIns="0" rtlCol="0" anchor="ctr">
-            <a:normAutofit/>
+            <a:normAutofit fontScale="92500"/>
           </a:bodyPr>
           <a:lstStyle/>
           <a:p>
@@ -15407,13 +15359,14 @@
                 <a:solidFill>
                   <a:srgbClr val="F7F8FB"/>
                 </a:solidFill>
-                <a:latin typeface="Aptos Display" pitchFamily="34" charset="0"/>
                 <a:ea typeface="Aptos Display" pitchFamily="34" charset="-122"/>
-                <a:cs typeface="Aptos Display" pitchFamily="34" charset="-120"/>
+                <a:cs typeface="+mj-cs"/>
               </a:rPr>
               <a:t>Agentic workflow: prompt log examples</a:t>
             </a:r>
-            <a:endParaRPr lang="en-US" sz="2500" dirty="0"/>
+            <a:endParaRPr lang="en-US" sz="2500" dirty="0">
+              <a:cs typeface="+mj-cs"/>
+            </a:endParaRPr>
           </a:p>
         </p:txBody>
       </p:sp>
@@ -15452,6 +15405,7 @@
                 <a:solidFill>
                   <a:srgbClr val="B9C4D1"/>
                 </a:solidFill>
+                <a:cs typeface="+mj-cs"/>
               </a:rPr>
               <a:t>We used Cursor suggestions critically: accepted, modified, </a:t>
             </a:r>
@@ -15459,6 +15413,7 @@
               <a:solidFill>
                 <a:srgbClr val="B9C4D1"/>
               </a:solidFill>
+              <a:cs typeface="+mj-cs"/>
             </a:endParaRPr>
           </a:p>
           <a:p>
@@ -15470,10 +15425,13 @@
                 <a:solidFill>
                   <a:srgbClr val="B9C4D1"/>
                 </a:solidFill>
+                <a:cs typeface="+mj-cs"/>
               </a:rPr>
               <a:t>or rejected based on course rules.</a:t>
             </a:r>
-            <a:endParaRPr lang="en-US" sz="1400" dirty="0"/>
+            <a:endParaRPr lang="en-US" sz="1400" dirty="0">
+              <a:cs typeface="+mj-cs"/>
+            </a:endParaRPr>
           </a:p>
         </p:txBody>
       </p:sp>
@@ -15522,10 +15480,13 @@
                 <a:solidFill>
                   <a:srgbClr val="F7F8FB"/>
                 </a:solidFill>
+                <a:cs typeface="+mj-cs"/>
               </a:rPr>
               <a:t>Cursor suggested</a:t>
             </a:r>
-            <a:endParaRPr lang="en-US" sz="1400" dirty="0"/>
+            <a:endParaRPr lang="en-US" sz="1400" dirty="0">
+              <a:cs typeface="+mj-cs"/>
+            </a:endParaRPr>
           </a:p>
         </p:txBody>
       </p:sp>
@@ -15574,10 +15535,13 @@
                 <a:solidFill>
                   <a:srgbClr val="F7F8FB"/>
                 </a:solidFill>
+                <a:cs typeface="+mj-cs"/>
               </a:rPr>
               <a:t>Our decision</a:t>
             </a:r>
-            <a:endParaRPr lang="en-US" sz="1400" dirty="0"/>
+            <a:endParaRPr lang="en-US" sz="1400" dirty="0">
+              <a:cs typeface="+mj-cs"/>
+            </a:endParaRPr>
           </a:p>
         </p:txBody>
       </p:sp>
@@ -15626,10 +15590,13 @@
                 <a:solidFill>
                   <a:srgbClr val="F7F8FB"/>
                 </a:solidFill>
+                <a:cs typeface="+mj-cs"/>
               </a:rPr>
               <a:t>Reason</a:t>
             </a:r>
-            <a:endParaRPr lang="en-US" sz="1400" dirty="0"/>
+            <a:endParaRPr lang="en-US" sz="1400" dirty="0">
+              <a:cs typeface="+mj-cs"/>
+            </a:endParaRPr>
           </a:p>
         </p:txBody>
       </p:sp>
@@ -15671,7 +15638,9 @@
           <a:bodyPr/>
           <a:lstStyle/>
           <a:p>
-            <a:endParaRPr lang="LID4096"/>
+            <a:endParaRPr lang="LID4096">
+              <a:cs typeface="+mj-cs"/>
+            </a:endParaRPr>
           </a:p>
         </p:txBody>
       </p:sp>
@@ -15713,7 +15682,9 @@
           <a:bodyPr/>
           <a:lstStyle/>
           <a:p>
-            <a:endParaRPr lang="LID4096"/>
+            <a:endParaRPr lang="LID4096">
+              <a:cs typeface="+mj-cs"/>
+            </a:endParaRPr>
           </a:p>
         </p:txBody>
       </p:sp>
@@ -15762,10 +15733,13 @@
                 <a:solidFill>
                   <a:srgbClr val="F7F8FB"/>
                 </a:solidFill>
+                <a:cs typeface="+mj-cs"/>
               </a:rPr>
               <a:t>Put cout inside</a:t>
             </a:r>
-            <a:endParaRPr lang="en-US" sz="1200" dirty="0"/>
+            <a:endParaRPr lang="en-US" sz="1200" dirty="0">
+              <a:cs typeface="+mj-cs"/>
+            </a:endParaRPr>
           </a:p>
           <a:p>
             <a:pPr marL="0" indent="0" algn="ctr">
@@ -15776,10 +15750,13 @@
                 <a:solidFill>
                   <a:srgbClr val="F7F8FB"/>
                 </a:solidFill>
+                <a:cs typeface="+mj-cs"/>
               </a:rPr>
               <a:t>Question</a:t>
             </a:r>
-            <a:endParaRPr lang="en-US" sz="1200" dirty="0"/>
+            <a:endParaRPr lang="en-US" sz="1200" dirty="0">
+              <a:cs typeface="+mj-cs"/>
+            </a:endParaRPr>
           </a:p>
         </p:txBody>
       </p:sp>
@@ -15828,10 +15805,13 @@
                 <a:solidFill>
                   <a:srgbClr val="F7F8FB"/>
                 </a:solidFill>
+                <a:cs typeface="+mj-cs"/>
               </a:rPr>
               <a:t>REJECTED</a:t>
             </a:r>
-            <a:endParaRPr lang="en-US" sz="1600" dirty="0"/>
+            <a:endParaRPr lang="en-US" sz="1600" dirty="0">
+              <a:cs typeface="+mj-cs"/>
+            </a:endParaRPr>
           </a:p>
         </p:txBody>
       </p:sp>
@@ -15872,6 +15852,7 @@
                 <a:solidFill>
                   <a:srgbClr val="F7F8FB"/>
                 </a:solidFill>
+                <a:cs typeface="+mj-cs"/>
               </a:rPr>
               <a:t>Question should store behavior/data only. All input and output stays in </a:t>
             </a:r>
@@ -15880,6 +15861,7 @@
                 <a:solidFill>
                   <a:srgbClr val="F7F8FB"/>
                 </a:solidFill>
+                <a:cs typeface="+mj-cs"/>
               </a:rPr>
               <a:t>ConsoleUI</a:t>
             </a:r>
@@ -15888,10 +15870,13 @@
                 <a:solidFill>
                   <a:srgbClr val="F7F8FB"/>
                 </a:solidFill>
+                <a:cs typeface="+mj-cs"/>
               </a:rPr>
               <a:t>.</a:t>
             </a:r>
-            <a:endParaRPr lang="en-US" sz="1400"/>
+            <a:endParaRPr lang="en-US" sz="1400">
+              <a:cs typeface="+mj-cs"/>
+            </a:endParaRPr>
           </a:p>
         </p:txBody>
       </p:sp>
@@ -15945,7 +15930,9 @@
           <a:lstStyle/>
           <a:p>
             <a:pPr algn="ctr"/>
-            <a:endParaRPr lang="LID4096" dirty="0"/>
+            <a:endParaRPr lang="LID4096" dirty="0">
+              <a:cs typeface="+mj-cs"/>
+            </a:endParaRPr>
           </a:p>
         </p:txBody>
       </p:sp>
@@ -15984,6 +15971,7 @@
                 <a:solidFill>
                   <a:srgbClr val="B9C4D1"/>
                 </a:solidFill>
+                <a:cs typeface="+mj-cs"/>
               </a:rPr>
               <a:t>Quiz Arena | OOP C++ Final Project | </a:t>
             </a:r>
@@ -15992,10 +15980,13 @@
                 <a:solidFill>
                   <a:srgbClr val="B9C4D1"/>
                 </a:solidFill>
+                <a:cs typeface="+mj-cs"/>
               </a:rPr>
               <a:t>9</a:t>
             </a:r>
-            <a:endParaRPr lang="en-US" sz="750" dirty="0"/>
+            <a:endParaRPr lang="en-US" sz="750" dirty="0">
+              <a:cs typeface="+mj-cs"/>
+            </a:endParaRPr>
           </a:p>
         </p:txBody>
       </p:sp>
@@ -16643,6 +16634,23 @@
 </file>
 
 <file path=customXml/item1.xml><?xml version="1.0" encoding="utf-8"?>
+<p:properties xmlns:p="http://schemas.microsoft.com/office/2006/metadata/properties" xmlns:xsi="http://www.w3.org/2001/XMLSchema-instance" xmlns:pc="http://schemas.microsoft.com/office/infopath/2007/PartnerControls">
+  <documentManagement>
+    <_activity xmlns="dc326360-c2d4-49e8-869f-22842a32ddef" xsi:nil="true"/>
+  </documentManagement>
+</p:properties>
+</file>
+
+<file path=customXml/item2.xml><?xml version="1.0" encoding="utf-8"?>
+<?mso-contentType ?>
+<FormTemplates xmlns="http://schemas.microsoft.com/sharepoint/v3/contenttype/forms">
+  <Display>DocumentLibraryForm</Display>
+  <Edit>DocumentLibraryForm</Edit>
+  <New>DocumentLibraryForm</New>
+</FormTemplates>
+</file>
+
+<file path=customXml/item3.xml><?xml version="1.0" encoding="utf-8"?>
 <ct:contentTypeSchema xmlns:ct="http://schemas.microsoft.com/office/2006/metadata/contentType" xmlns:ma="http://schemas.microsoft.com/office/2006/metadata/properties/metaAttributes" ct:_="" ma:_="" ma:contentTypeName="Document" ma:contentTypeID="0x01010045CDE2E39EB08043806489AFE8278BEA" ma:contentTypeVersion="6" ma:contentTypeDescription="Create a new document." ma:contentTypeScope="" ma:versionID="4969b5e9fe7db14ed7dbe2ed9e3d23f3">
   <xsd:schema xmlns:xsd="http://www.w3.org/2001/XMLSchema" xmlns:xs="http://www.w3.org/2001/XMLSchema" xmlns:p="http://schemas.microsoft.com/office/2006/metadata/properties" xmlns:ns3="dc326360-c2d4-49e8-869f-22842a32ddef" targetNamespace="http://schemas.microsoft.com/office/2006/metadata/properties" ma:root="true" ma:fieldsID="fcfe44127cbd787e8f5f1aa79a508a57" ns3:_="">
     <xsd:import namespace="dc326360-c2d4-49e8-869f-22842a32ddef"/>
@@ -16798,24 +16806,31 @@
 </ct:contentTypeSchema>
 </file>
 
-<file path=customXml/item2.xml><?xml version="1.0" encoding="utf-8"?>
-<?mso-contentType ?>
-<FormTemplates xmlns="http://schemas.microsoft.com/sharepoint/v3/contenttype/forms">
-  <Display>DocumentLibraryForm</Display>
-  <Edit>DocumentLibraryForm</Edit>
-  <New>DocumentLibraryForm</New>
-</FormTemplates>
+<file path=customXml/itemProps1.xml><?xml version="1.0" encoding="utf-8"?>
+<ds:datastoreItem xmlns:ds="http://schemas.openxmlformats.org/officeDocument/2006/customXml" ds:itemID="{1BF7960A-A15D-48BD-93F3-24E058A5E7CF}">
+  <ds:schemaRefs>
+    <ds:schemaRef ds:uri="http://purl.org/dc/elements/1.1/"/>
+    <ds:schemaRef ds:uri="http://www.w3.org/XML/1998/namespace"/>
+    <ds:schemaRef ds:uri="http://schemas.microsoft.com/office/2006/documentManagement/types"/>
+    <ds:schemaRef ds:uri="http://purl.org/dc/dcmitype/"/>
+    <ds:schemaRef ds:uri="http://schemas.microsoft.com/office/2006/metadata/properties"/>
+    <ds:schemaRef ds:uri="http://schemas.microsoft.com/office/infopath/2007/PartnerControls"/>
+    <ds:schemaRef ds:uri="http://schemas.openxmlformats.org/package/2006/metadata/core-properties"/>
+    <ds:schemaRef ds:uri="dc326360-c2d4-49e8-869f-22842a32ddef"/>
+    <ds:schemaRef ds:uri="http://purl.org/dc/terms/"/>
+  </ds:schemaRefs>
+</ds:datastoreItem>
 </file>
 
-<file path=customXml/item3.xml><?xml version="1.0" encoding="utf-8"?>
-<p:properties xmlns:p="http://schemas.microsoft.com/office/2006/metadata/properties" xmlns:xsi="http://www.w3.org/2001/XMLSchema-instance" xmlns:pc="http://schemas.microsoft.com/office/infopath/2007/PartnerControls">
-  <documentManagement>
-    <_activity xmlns="dc326360-c2d4-49e8-869f-22842a32ddef" xsi:nil="true"/>
-  </documentManagement>
-</p:properties>
+<file path=customXml/itemProps2.xml><?xml version="1.0" encoding="utf-8"?>
+<ds:datastoreItem xmlns:ds="http://schemas.openxmlformats.org/officeDocument/2006/customXml" ds:itemID="{0924664C-6B27-4E2D-8542-F0E19F5EC5C7}">
+  <ds:schemaRefs>
+    <ds:schemaRef ds:uri="http://schemas.microsoft.com/sharepoint/v3/contenttype/forms"/>
+  </ds:schemaRefs>
+</ds:datastoreItem>
 </file>
 
-<file path=customXml/itemProps1.xml><?xml version="1.0" encoding="utf-8"?>
+<file path=customXml/itemProps3.xml><?xml version="1.0" encoding="utf-8"?>
 <ds:datastoreItem xmlns:ds="http://schemas.openxmlformats.org/officeDocument/2006/customXml" ds:itemID="{E2544F67-14EE-49DB-BD06-C16724A0EEBB}">
   <ds:schemaRefs>
     <ds:schemaRef ds:uri="http://schemas.microsoft.com/office/2006/metadata/contentType"/>
@@ -16831,28 +16846,4 @@
     <ds:schemaRef ds:uri="http://schemas.microsoft.com/internal/obd"/>
   </ds:schemaRefs>
 </ds:datastoreItem>
-</file>
-
-<file path=customXml/itemProps2.xml><?xml version="1.0" encoding="utf-8"?>
-<ds:datastoreItem xmlns:ds="http://schemas.openxmlformats.org/officeDocument/2006/customXml" ds:itemID="{0924664C-6B27-4E2D-8542-F0E19F5EC5C7}">
-  <ds:schemaRefs>
-    <ds:schemaRef ds:uri="http://schemas.microsoft.com/sharepoint/v3/contenttype/forms"/>
-  </ds:schemaRefs>
-</ds:datastoreItem>
-</file>
-
-<file path=customXml/itemProps3.xml><?xml version="1.0" encoding="utf-8"?>
-<ds:datastoreItem xmlns:ds="http://schemas.openxmlformats.org/officeDocument/2006/customXml" ds:itemID="{1BF7960A-A15D-48BD-93F3-24E058A5E7CF}">
-  <ds:schemaRefs>
-    <ds:schemaRef ds:uri="http://purl.org/dc/elements/1.1/"/>
-    <ds:schemaRef ds:uri="http://www.w3.org/XML/1998/namespace"/>
-    <ds:schemaRef ds:uri="http://schemas.microsoft.com/office/2006/documentManagement/types"/>
-    <ds:schemaRef ds:uri="http://purl.org/dc/dcmitype/"/>
-    <ds:schemaRef ds:uri="http://schemas.microsoft.com/office/2006/metadata/properties"/>
-    <ds:schemaRef ds:uri="http://schemas.microsoft.com/office/infopath/2007/PartnerControls"/>
-    <ds:schemaRef ds:uri="http://schemas.openxmlformats.org/package/2006/metadata/core-properties"/>
-    <ds:schemaRef ds:uri="dc326360-c2d4-49e8-869f-22842a32ddef"/>
-    <ds:schemaRef ds:uri="http://purl.org/dc/terms/"/>
-  </ds:schemaRefs>
-</ds:datastoreItem>
 </file>
--- a/Presentation/QuizArena.pptx
+++ b/Presentation/QuizArena.pptx
@@ -216,7 +216,7 @@
           <a:p>
             <a:fld id="{3B985EC4-34A2-4481-B882-DCBB7B1C39E1}" type="datetimeFigureOut">
               <a:rPr lang="LID4096" smtClean="0"/>
-              <a:t>08/05/2026</a:t>
+              <a:t>08/07/2026</a:t>
             </a:fld>
             <a:endParaRPr lang="LID4096"/>
           </a:p>
@@ -1200,7 +1200,7 @@
             <a:fld id="{B61BEF0D-F0BB-DE4B-95CE-6DB70DBA9567}" type="datetimeFigureOut">
               <a:rPr lang="en-US" smtClean="0"/>
               <a:pPr/>
-              <a:t>8/5/2026</a:t>
+              <a:t>8/7/2026</a:t>
             </a:fld>
             <a:endParaRPr lang="en-US"/>
           </a:p>
@@ -1371,7 +1371,7 @@
             <a:fld id="{B61BEF0D-F0BB-DE4B-95CE-6DB70DBA9567}" type="datetimeFigureOut">
               <a:rPr lang="en-US" smtClean="0"/>
               <a:pPr/>
-              <a:t>8/5/2026</a:t>
+              <a:t>8/7/2026</a:t>
             </a:fld>
             <a:endParaRPr lang="en-US"/>
           </a:p>
@@ -1552,7 +1552,7 @@
             <a:fld id="{B61BEF0D-F0BB-DE4B-95CE-6DB70DBA9567}" type="datetimeFigureOut">
               <a:rPr lang="en-US" smtClean="0"/>
               <a:pPr/>
-              <a:t>8/5/2026</a:t>
+              <a:t>8/7/2026</a:t>
             </a:fld>
             <a:endParaRPr lang="en-US"/>
           </a:p>
@@ -1793,7 +1793,7 @@
             <a:fld id="{B61BEF0D-F0BB-DE4B-95CE-6DB70DBA9567}" type="datetimeFigureOut">
               <a:rPr lang="en-US" smtClean="0"/>
               <a:pPr/>
-              <a:t>8/5/2026</a:t>
+              <a:t>8/7/2026</a:t>
             </a:fld>
             <a:endParaRPr lang="en-US"/>
           </a:p>
@@ -2041,7 +2041,7 @@
             <a:fld id="{B61BEF0D-F0BB-DE4B-95CE-6DB70DBA9567}" type="datetimeFigureOut">
               <a:rPr lang="en-US" smtClean="0"/>
               <a:pPr/>
-              <a:t>8/5/2026</a:t>
+              <a:t>8/7/2026</a:t>
             </a:fld>
             <a:endParaRPr lang="en-US"/>
           </a:p>
@@ -2273,7 +2273,7 @@
             <a:fld id="{B61BEF0D-F0BB-DE4B-95CE-6DB70DBA9567}" type="datetimeFigureOut">
               <a:rPr lang="en-US" smtClean="0"/>
               <a:pPr/>
-              <a:t>8/5/2026</a:t>
+              <a:t>8/7/2026</a:t>
             </a:fld>
             <a:endParaRPr lang="en-US"/>
           </a:p>
@@ -2640,7 +2640,7 @@
             <a:fld id="{B61BEF0D-F0BB-DE4B-95CE-6DB70DBA9567}" type="datetimeFigureOut">
               <a:rPr lang="en-US" smtClean="0"/>
               <a:pPr/>
-              <a:t>8/5/2026</a:t>
+              <a:t>8/7/2026</a:t>
             </a:fld>
             <a:endParaRPr lang="en-US"/>
           </a:p>
@@ -2760,7 +2760,7 @@
             <a:fld id="{B61BEF0D-F0BB-DE4B-95CE-6DB70DBA9567}" type="datetimeFigureOut">
               <a:rPr lang="en-US" smtClean="0"/>
               <a:pPr/>
-              <a:t>8/5/2026</a:t>
+              <a:t>8/7/2026</a:t>
             </a:fld>
             <a:endParaRPr lang="en-US"/>
           </a:p>
@@ -2858,7 +2858,7 @@
             <a:fld id="{B61BEF0D-F0BB-DE4B-95CE-6DB70DBA9567}" type="datetimeFigureOut">
               <a:rPr lang="en-US" smtClean="0"/>
               <a:pPr/>
-              <a:t>8/5/2026</a:t>
+              <a:t>8/7/2026</a:t>
             </a:fld>
             <a:endParaRPr lang="en-US"/>
           </a:p>
@@ -3136,7 +3136,7 @@
             <a:fld id="{B61BEF0D-F0BB-DE4B-95CE-6DB70DBA9567}" type="datetimeFigureOut">
               <a:rPr lang="en-US" smtClean="0"/>
               <a:pPr/>
-              <a:t>8/5/2026</a:t>
+              <a:t>8/7/2026</a:t>
             </a:fld>
             <a:endParaRPr lang="en-US"/>
           </a:p>
@@ -3394,7 +3394,7 @@
             <a:fld id="{B61BEF0D-F0BB-DE4B-95CE-6DB70DBA9567}" type="datetimeFigureOut">
               <a:rPr lang="en-US" smtClean="0"/>
               <a:pPr/>
-              <a:t>8/5/2026</a:t>
+              <a:t>8/7/2026</a:t>
             </a:fld>
             <a:endParaRPr lang="en-US"/>
           </a:p>
@@ -3608,7 +3608,7 @@
             <a:fld id="{B61BEF0D-F0BB-DE4B-95CE-6DB70DBA9567}" type="datetimeFigureOut">
               <a:rPr lang="en-US" smtClean="0"/>
               <a:pPr/>
-              <a:t>8/5/2026</a:t>
+              <a:t>8/7/2026</a:t>
             </a:fld>
             <a:endParaRPr lang="en-US"/>
           </a:p>
@@ -13110,12 +13110,130 @@
           <a:chExt cx="0" cy="0"/>
         </a:xfrm>
       </p:grpSpPr>
+      <p:sp>
+        <p:nvSpPr>
+          <p:cNvPr id="8" name="TextBox 7">
+            <a:extLst>
+              <a:ext uri="{FF2B5EF4-FFF2-40B4-BE49-F238E27FC236}">
+                <a16:creationId xmlns:a16="http://schemas.microsoft.com/office/drawing/2014/main" id="{DDE4C920-24A6-DD6D-F0C7-AB04B8562866}"/>
+              </a:ext>
+            </a:extLst>
+          </p:cNvPr>
+          <p:cNvSpPr txBox="1"/>
+          <p:nvPr/>
+        </p:nvSpPr>
+        <p:spPr>
+          <a:xfrm>
+            <a:off x="54272" y="3059667"/>
+            <a:ext cx="3978298" cy="738664"/>
+          </a:xfrm>
+          <a:prstGeom prst="rect">
+            <a:avLst/>
+          </a:prstGeom>
+          <a:noFill/>
+        </p:spPr>
+        <p:txBody>
+          <a:bodyPr wrap="square">
+            <a:spAutoFit/>
+          </a:bodyPr>
+          <a:lstStyle/>
+          <a:p>
+            <a:pPr marL="0" indent="0">
+              <a:buNone/>
+            </a:pPr>
+            <a:r>
+              <a:rPr lang="en-US" sz="4200" b="1" dirty="0">
+                <a:solidFill>
+                  <a:srgbClr val="F7F8FB"/>
+                </a:solidFill>
+                <a:latin typeface="Aptos Display" pitchFamily="34" charset="0"/>
+                <a:ea typeface="Aptos Display" pitchFamily="34" charset="-122"/>
+                <a:cs typeface="Aptos Display" pitchFamily="34" charset="-120"/>
+              </a:rPr>
+              <a:t>Quiz Arena</a:t>
+            </a:r>
+            <a:r>
+              <a:rPr lang="he-IL" sz="4200" b="1" dirty="0">
+                <a:solidFill>
+                  <a:srgbClr val="F7F8FB"/>
+                </a:solidFill>
+                <a:latin typeface="Aptos Display" pitchFamily="34" charset="0"/>
+                <a:ea typeface="Aptos Display" pitchFamily="34" charset="-122"/>
+                <a:cs typeface="Aptos Display" pitchFamily="34" charset="-120"/>
+              </a:rPr>
+              <a:t> </a:t>
+            </a:r>
+            <a:r>
+              <a:rPr lang="en-US" sz="4200" b="1" dirty="0">
+                <a:solidFill>
+                  <a:srgbClr val="F7F8FB"/>
+                </a:solidFill>
+                <a:latin typeface="Aptos Display" pitchFamily="34" charset="0"/>
+                <a:ea typeface="Aptos Display" pitchFamily="34" charset="-122"/>
+                <a:cs typeface="Aptos Display" pitchFamily="34" charset="-120"/>
+              </a:rPr>
+              <a:t> UML</a:t>
+            </a:r>
+            <a:endParaRPr lang="en-US" sz="4200" dirty="0"/>
+          </a:p>
+        </p:txBody>
+      </p:sp>
+      <p:sp>
+        <p:nvSpPr>
+          <p:cNvPr id="10" name="Text 15">
+            <a:extLst>
+              <a:ext uri="{FF2B5EF4-FFF2-40B4-BE49-F238E27FC236}">
+                <a16:creationId xmlns:a16="http://schemas.microsoft.com/office/drawing/2014/main" id="{17D1F329-4685-1B0E-1FA5-DBFDCAE42B57}"/>
+              </a:ext>
+            </a:extLst>
+          </p:cNvPr>
+          <p:cNvSpPr/>
+          <p:nvPr/>
+        </p:nvSpPr>
+        <p:spPr>
+          <a:xfrm>
+            <a:off x="2432370" y="6637087"/>
+            <a:ext cx="1600200" cy="182880"/>
+          </a:xfrm>
+          <a:prstGeom prst="rect">
+            <a:avLst/>
+          </a:prstGeom>
+          <a:noFill/>
+          <a:ln/>
+        </p:spPr>
+        <p:txBody>
+          <a:bodyPr wrap="square" lIns="0" tIns="0" rIns="0" bIns="0" rtlCol="0" anchor="ctr"/>
+          <a:lstStyle/>
+          <a:p>
+            <a:pPr marL="0" indent="0" algn="r">
+              <a:buNone/>
+            </a:pPr>
+            <a:r>
+              <a:rPr lang="en-US" sz="750" dirty="0">
+                <a:solidFill>
+                  <a:srgbClr val="B9C4D1"/>
+                </a:solidFill>
+              </a:rPr>
+              <a:t>Quiz Arena | OOP C++ Final Project | </a:t>
+            </a:r>
+            <a:r>
+              <a:rPr lang="he-IL" sz="750" dirty="0">
+                <a:solidFill>
+                  <a:srgbClr val="B9C4D1"/>
+                </a:solidFill>
+              </a:rPr>
+              <a:t>5</a:t>
+            </a:r>
+            <a:endParaRPr lang="en-US" sz="750" dirty="0"/>
+          </a:p>
+        </p:txBody>
+      </p:sp>
       <p:pic>
         <p:nvPicPr>
-          <p:cNvPr id="6" name="Picture 5">
+          <p:cNvPr id="3" name="Picture 2">
             <a:extLst>
               <a:ext uri="{FF2B5EF4-FFF2-40B4-BE49-F238E27FC236}">
-                <a16:creationId xmlns:a16="http://schemas.microsoft.com/office/drawing/2014/main" id="{24EF0A81-8109-84DF-2E05-093F02154F16}"/>
+                <a16:creationId xmlns:a16="http://schemas.microsoft.com/office/drawing/2014/main" id="{45E7F1B8-2E97-9970-7F23-89A068C3BDAF}"/>
               </a:ext>
             </a:extLst>
           </p:cNvPr>
@@ -13138,132 +13256,14 @@
         </p:blipFill>
         <p:spPr>
           <a:xfrm>
-            <a:off x="4091086" y="38032"/>
-            <a:ext cx="7881633" cy="6781935"/>
+            <a:off x="4169251" y="48131"/>
+            <a:ext cx="7968477" cy="6771836"/>
           </a:xfrm>
           <a:prstGeom prst="rect">
             <a:avLst/>
           </a:prstGeom>
         </p:spPr>
       </p:pic>
-      <p:sp>
-        <p:nvSpPr>
-          <p:cNvPr id="8" name="TextBox 7">
-            <a:extLst>
-              <a:ext uri="{FF2B5EF4-FFF2-40B4-BE49-F238E27FC236}">
-                <a16:creationId xmlns:a16="http://schemas.microsoft.com/office/drawing/2014/main" id="{DDE4C920-24A6-DD6D-F0C7-AB04B8562866}"/>
-              </a:ext>
-            </a:extLst>
-          </p:cNvPr>
-          <p:cNvSpPr txBox="1"/>
-          <p:nvPr/>
-        </p:nvSpPr>
-        <p:spPr>
-          <a:xfrm>
-            <a:off x="54272" y="3059667"/>
-            <a:ext cx="3978298" cy="738664"/>
-          </a:xfrm>
-          <a:prstGeom prst="rect">
-            <a:avLst/>
-          </a:prstGeom>
-          <a:noFill/>
-        </p:spPr>
-        <p:txBody>
-          <a:bodyPr wrap="square">
-            <a:spAutoFit/>
-          </a:bodyPr>
-          <a:lstStyle/>
-          <a:p>
-            <a:pPr marL="0" indent="0">
-              <a:buNone/>
-            </a:pPr>
-            <a:r>
-              <a:rPr lang="en-US" sz="4200" b="1" dirty="0">
-                <a:solidFill>
-                  <a:srgbClr val="F7F8FB"/>
-                </a:solidFill>
-                <a:latin typeface="Aptos Display" pitchFamily="34" charset="0"/>
-                <a:ea typeface="Aptos Display" pitchFamily="34" charset="-122"/>
-                <a:cs typeface="Aptos Display" pitchFamily="34" charset="-120"/>
-              </a:rPr>
-              <a:t>Quiz Arena</a:t>
-            </a:r>
-            <a:r>
-              <a:rPr lang="he-IL" sz="4200" b="1" dirty="0">
-                <a:solidFill>
-                  <a:srgbClr val="F7F8FB"/>
-                </a:solidFill>
-                <a:latin typeface="Aptos Display" pitchFamily="34" charset="0"/>
-                <a:ea typeface="Aptos Display" pitchFamily="34" charset="-122"/>
-                <a:cs typeface="Aptos Display" pitchFamily="34" charset="-120"/>
-              </a:rPr>
-              <a:t> </a:t>
-            </a:r>
-            <a:r>
-              <a:rPr lang="en-US" sz="4200" b="1" dirty="0">
-                <a:solidFill>
-                  <a:srgbClr val="F7F8FB"/>
-                </a:solidFill>
-                <a:latin typeface="Aptos Display" pitchFamily="34" charset="0"/>
-                <a:ea typeface="Aptos Display" pitchFamily="34" charset="-122"/>
-                <a:cs typeface="Aptos Display" pitchFamily="34" charset="-120"/>
-              </a:rPr>
-              <a:t> UML</a:t>
-            </a:r>
-            <a:endParaRPr lang="en-US" sz="4200" dirty="0"/>
-          </a:p>
-        </p:txBody>
-      </p:sp>
-      <p:sp>
-        <p:nvSpPr>
-          <p:cNvPr id="10" name="Text 15">
-            <a:extLst>
-              <a:ext uri="{FF2B5EF4-FFF2-40B4-BE49-F238E27FC236}">
-                <a16:creationId xmlns:a16="http://schemas.microsoft.com/office/drawing/2014/main" id="{17D1F329-4685-1B0E-1FA5-DBFDCAE42B57}"/>
-              </a:ext>
-            </a:extLst>
-          </p:cNvPr>
-          <p:cNvSpPr/>
-          <p:nvPr/>
-        </p:nvSpPr>
-        <p:spPr>
-          <a:xfrm>
-            <a:off x="2432370" y="6637087"/>
-            <a:ext cx="1600200" cy="182880"/>
-          </a:xfrm>
-          <a:prstGeom prst="rect">
-            <a:avLst/>
-          </a:prstGeom>
-          <a:noFill/>
-          <a:ln/>
-        </p:spPr>
-        <p:txBody>
-          <a:bodyPr wrap="square" lIns="0" tIns="0" rIns="0" bIns="0" rtlCol="0" anchor="ctr"/>
-          <a:lstStyle/>
-          <a:p>
-            <a:pPr marL="0" indent="0" algn="r">
-              <a:buNone/>
-            </a:pPr>
-            <a:r>
-              <a:rPr lang="en-US" sz="750" dirty="0">
-                <a:solidFill>
-                  <a:srgbClr val="B9C4D1"/>
-                </a:solidFill>
-              </a:rPr>
-              <a:t>Quiz Arena | OOP C++ Final Project | </a:t>
-            </a:r>
-            <a:r>
-              <a:rPr lang="he-IL" sz="750" dirty="0">
-                <a:solidFill>
-                  <a:srgbClr val="B9C4D1"/>
-                </a:solidFill>
-              </a:rPr>
-              <a:t>5</a:t>
-            </a:r>
-            <a:endParaRPr lang="en-US" sz="750" dirty="0"/>
-          </a:p>
-        </p:txBody>
-      </p:sp>
     </p:spTree>
     <p:extLst>
       <p:ext uri="{BB962C8B-B14F-4D97-AF65-F5344CB8AC3E}">
@@ -16634,20 +16634,20 @@
 </file>
 
 <file path=customXml/item1.xml><?xml version="1.0" encoding="utf-8"?>
-<p:properties xmlns:p="http://schemas.microsoft.com/office/2006/metadata/properties" xmlns:xsi="http://www.w3.org/2001/XMLSchema-instance" xmlns:pc="http://schemas.microsoft.com/office/infopath/2007/PartnerControls">
-  <documentManagement>
-    <_activity xmlns="dc326360-c2d4-49e8-869f-22842a32ddef" xsi:nil="true"/>
-  </documentManagement>
-</p:properties>
-</file>
-
-<file path=customXml/item2.xml><?xml version="1.0" encoding="utf-8"?>
 <?mso-contentType ?>
 <FormTemplates xmlns="http://schemas.microsoft.com/sharepoint/v3/contenttype/forms">
   <Display>DocumentLibraryForm</Display>
   <Edit>DocumentLibraryForm</Edit>
   <New>DocumentLibraryForm</New>
 </FormTemplates>
+</file>
+
+<file path=customXml/item2.xml><?xml version="1.0" encoding="utf-8"?>
+<p:properties xmlns:p="http://schemas.microsoft.com/office/2006/metadata/properties" xmlns:xsi="http://www.w3.org/2001/XMLSchema-instance" xmlns:pc="http://schemas.microsoft.com/office/infopath/2007/PartnerControls">
+  <documentManagement>
+    <_activity xmlns="dc326360-c2d4-49e8-869f-22842a32ddef" xsi:nil="true"/>
+  </documentManagement>
+</p:properties>
 </file>
 
 <file path=customXml/item3.xml><?xml version="1.0" encoding="utf-8"?>
@@ -16807,6 +16807,14 @@
 </file>
 
 <file path=customXml/itemProps1.xml><?xml version="1.0" encoding="utf-8"?>
+<ds:datastoreItem xmlns:ds="http://schemas.openxmlformats.org/officeDocument/2006/customXml" ds:itemID="{0924664C-6B27-4E2D-8542-F0E19F5EC5C7}">
+  <ds:schemaRefs>
+    <ds:schemaRef ds:uri="http://schemas.microsoft.com/sharepoint/v3/contenttype/forms"/>
+  </ds:schemaRefs>
+</ds:datastoreItem>
+</file>
+
+<file path=customXml/itemProps2.xml><?xml version="1.0" encoding="utf-8"?>
 <ds:datastoreItem xmlns:ds="http://schemas.openxmlformats.org/officeDocument/2006/customXml" ds:itemID="{1BF7960A-A15D-48BD-93F3-24E058A5E7CF}">
   <ds:schemaRefs>
     <ds:schemaRef ds:uri="http://purl.org/dc/elements/1.1/"/>
@@ -16818,14 +16826,6 @@
     <ds:schemaRef ds:uri="http://schemas.openxmlformats.org/package/2006/metadata/core-properties"/>
     <ds:schemaRef ds:uri="dc326360-c2d4-49e8-869f-22842a32ddef"/>
     <ds:schemaRef ds:uri="http://purl.org/dc/terms/"/>
-  </ds:schemaRefs>
-</ds:datastoreItem>
-</file>
-
-<file path=customXml/itemProps2.xml><?xml version="1.0" encoding="utf-8"?>
-<ds:datastoreItem xmlns:ds="http://schemas.openxmlformats.org/officeDocument/2006/customXml" ds:itemID="{0924664C-6B27-4E2D-8542-F0E19F5EC5C7}">
-  <ds:schemaRefs>
-    <ds:schemaRef ds:uri="http://schemas.microsoft.com/sharepoint/v3/contenttype/forms"/>
   </ds:schemaRefs>
 </ds:datastoreItem>
 </file>

--- a/Presentation/QuizArena.pptx
+++ b/Presentation/QuizArena.pptx
@@ -4643,37 +4643,6 @@
           </a:p>
         </p:txBody>
       </p:sp>
-      <p:pic>
-        <p:nvPicPr>
-          <p:cNvPr id="15" name="Picture 14">
-            <a:extLst>
-              <a:ext uri="{FF2B5EF4-FFF2-40B4-BE49-F238E27FC236}">
-                <a16:creationId xmlns:a16="http://schemas.microsoft.com/office/drawing/2014/main" id="{CFD2FAF0-F2B2-199A-126E-0B1368650BB2}"/>
-              </a:ext>
-            </a:extLst>
-          </p:cNvPr>
-          <p:cNvPicPr>
-            <a:picLocks noChangeAspect="1"/>
-          </p:cNvPicPr>
-          <p:nvPr/>
-        </p:nvPicPr>
-        <p:blipFill>
-          <a:blip r:embed="rId3"/>
-          <a:srcRect t="16427"/>
-          <a:stretch>
-            <a:fillRect/>
-          </a:stretch>
-        </p:blipFill>
-        <p:spPr>
-          <a:xfrm>
-            <a:off x="7280600" y="1234440"/>
-            <a:ext cx="4402130" cy="1463040"/>
-          </a:xfrm>
-          <a:prstGeom prst="rect">
-            <a:avLst/>
-          </a:prstGeom>
-        </p:spPr>
-      </p:pic>
       <p:sp>
         <p:nvSpPr>
           <p:cNvPr id="17" name="Text 3">
@@ -4706,7 +4675,7 @@
             </a:pPr>
             <a:r>
               <a:rPr lang="en-US" sz="2800" b="1" dirty="0">
-                <a:hlinkClick r:id="rId4">
+                <a:hlinkClick r:id="rId3">
                   <a:extLst>
                     <a:ext uri="{A12FA001-AC4F-418D-AE19-62706E023703}">
                       <ahyp:hlinkClr xmlns:ahyp="http://schemas.microsoft.com/office/drawing/2018/hyperlinkcolor" val="tx"/>
@@ -4720,6 +4689,36 @@
           </a:p>
         </p:txBody>
       </p:sp>
+      <p:pic>
+        <p:nvPicPr>
+          <p:cNvPr id="14" name="Picture 13">
+            <a:extLst>
+              <a:ext uri="{FF2B5EF4-FFF2-40B4-BE49-F238E27FC236}">
+                <a16:creationId xmlns:a16="http://schemas.microsoft.com/office/drawing/2014/main" id="{49DB4C0B-3A0E-4A88-B1D2-D119477987CF}"/>
+              </a:ext>
+            </a:extLst>
+          </p:cNvPr>
+          <p:cNvPicPr>
+            <a:picLocks noChangeAspect="1"/>
+          </p:cNvPicPr>
+          <p:nvPr/>
+        </p:nvPicPr>
+        <p:blipFill>
+          <a:blip r:embed="rId4"/>
+          <a:stretch>
+            <a:fillRect/>
+          </a:stretch>
+        </p:blipFill>
+        <p:spPr>
+          <a:xfrm>
+            <a:off x="7271977" y="1189214"/>
+            <a:ext cx="4714325" cy="1547128"/>
+          </a:xfrm>
+          <a:prstGeom prst="rect">
+            <a:avLst/>
+          </a:prstGeom>
+        </p:spPr>
+      </p:pic>
     </p:spTree>
   </p:cSld>
   <p:clrMapOvr>
@@ -8529,7 +8528,7 @@
               </a:defRPr>
             </a:pPr>
             <a:r>
-              <a:rPr sz="840">
+              <a:rPr sz="840" dirty="0" err="1">
                 <a:solidFill>
                   <a:srgbClr val="161616"/>
                 </a:solidFill>
@@ -8539,13 +8538,20 @@
               </a:rPr>
               <a:t>m_options</a:t>
             </a:r>
-          </a:p>
-          <a:p>
-            <a:pPr algn="l">
+            <a:endParaRPr sz="840" dirty="0">
+              <a:solidFill>
+                <a:srgbClr val="161616"/>
+              </a:solidFill>
+              <a:latin typeface="Arial"/>
+              <a:ea typeface="Arial"/>
+              <a:cs typeface="Arial"/>
+            </a:endParaRPr>
+          </a:p>
+          <a:p>
+            <a:pPr>
               <a:lnSpc>
                 <a:spcPct val="105000"/>
               </a:lnSpc>
-              <a:buNone/>
               <a:defRPr sz="1050" b="0" i="0">
                 <a:solidFill>
                   <a:srgbClr val="161616"/>
@@ -8556,7 +8562,7 @@
               </a:defRPr>
             </a:pPr>
             <a:r>
-              <a:rPr sz="840">
+              <a:rPr lang="en-US" sz="840" dirty="0" err="1">
                 <a:solidFill>
                   <a:srgbClr val="161616"/>
                 </a:solidFill>
@@ -8564,8 +8570,16 @@
                 <a:ea typeface="Arial"/>
                 <a:cs typeface="Arial"/>
               </a:rPr>
-              <a:t>m_correctIndex</a:t>
-            </a:r>
+              <a:t>m_questionIndex</a:t>
+            </a:r>
+            <a:endParaRPr sz="840" dirty="0">
+              <a:solidFill>
+                <a:srgbClr val="161616"/>
+              </a:solidFill>
+              <a:latin typeface="Arial"/>
+              <a:ea typeface="Arial"/>
+              <a:cs typeface="Arial"/>
+            </a:endParaRPr>
           </a:p>
         </p:txBody>
       </p:sp>
@@ -10351,95 +10365,6 @@
           <a:lstStyle/>
           <a:p>
             <a:endParaRPr lang="LID4096" sz="1440"/>
-          </a:p>
-        </p:txBody>
-      </p:sp>
-      <p:sp>
-        <p:nvSpPr>
-          <p:cNvPr id="49" name="Rectangle 48">
-            <a:extLst>
-              <a:ext uri="{FF2B5EF4-FFF2-40B4-BE49-F238E27FC236}">
-                <a16:creationId xmlns:a16="http://schemas.microsoft.com/office/drawing/2014/main" id="{8E075365-8BC3-44FA-BF3B-AB778DD4E5B4}"/>
-              </a:ext>
-            </a:extLst>
-          </p:cNvPr>
-          <p:cNvSpPr>
-            <a:spLocks noGrp="1"/>
-          </p:cNvSpPr>
-          <p:nvPr/>
-        </p:nvSpPr>
-        <p:spPr>
-          <a:xfrm>
-            <a:off x="8153400" y="4914900"/>
-            <a:ext cx="1295400" cy="243840"/>
-          </a:xfrm>
-          <a:prstGeom prst="rect">
-            <a:avLst/>
-          </a:prstGeom>
-          <a:noFill/>
-          <a:ln w="0">
-            <a:noFill/>
-            <a:prstDash val="solid"/>
-          </a:ln>
-        </p:spPr>
-        <p:txBody>
-          <a:bodyPr wrap="square" lIns="15240" tIns="15240" rIns="15240" bIns="15240" anchor="t">
-            <a:normAutofit fontScale="92970" lnSpcReduction="10000"/>
-          </a:bodyPr>
-          <a:lstStyle/>
-          <a:p>
-            <a:pPr algn="l">
-              <a:lnSpc>
-                <a:spcPct val="105000"/>
-              </a:lnSpc>
-              <a:buNone/>
-              <a:defRPr sz="975" b="0" i="0">
-                <a:solidFill>
-                  <a:srgbClr val="161616"/>
-                </a:solidFill>
-                <a:latin typeface="Arial"/>
-                <a:ea typeface="Arial"/>
-                <a:cs typeface="Arial"/>
-              </a:defRPr>
-            </a:pPr>
-            <a:r>
-              <a:rPr sz="780">
-                <a:solidFill>
-                  <a:srgbClr val="161616"/>
-                </a:solidFill>
-                <a:latin typeface="Arial"/>
-                <a:ea typeface="Arial"/>
-                <a:cs typeface="Arial"/>
-              </a:rPr>
-              <a:t>mode-based save data</a:t>
-            </a:r>
-          </a:p>
-          <a:p>
-            <a:pPr algn="l">
-              <a:lnSpc>
-                <a:spcPct val="105000"/>
-              </a:lnSpc>
-              <a:buNone/>
-              <a:defRPr sz="975" b="0" i="0">
-                <a:solidFill>
-                  <a:srgbClr val="161616"/>
-                </a:solidFill>
-                <a:latin typeface="Arial"/>
-                <a:ea typeface="Arial"/>
-                <a:cs typeface="Arial"/>
-              </a:defRPr>
-            </a:pPr>
-            <a:r>
-              <a:rPr sz="780">
-                <a:solidFill>
-                  <a:srgbClr val="161616"/>
-                </a:solidFill>
-                <a:latin typeface="Arial"/>
-                <a:ea typeface="Arial"/>
-                <a:cs typeface="Arial"/>
-              </a:rPr>
-              <a:t>(e.g., settings, progress)</a:t>
-            </a:r>
           </a:p>
         </p:txBody>
       </p:sp>
@@ -12828,6 +12753,12 @@
             </a:avLst>
           </a:prstGeom>
           <a:ln>
+            <a:solidFill>
+              <a:schemeClr val="accent1">
+                <a:lumMod val="40000"/>
+                <a:lumOff val="60000"/>
+              </a:schemeClr>
+            </a:solidFill>
             <a:headEnd type="none"/>
             <a:tailEnd type="diamond" w="lg" len="lg"/>
           </a:ln>
@@ -13069,6 +13000,87 @@
               <a:t>4</a:t>
             </a:r>
             <a:endParaRPr lang="en-US" sz="750" dirty="0"/>
+          </a:p>
+        </p:txBody>
+      </p:sp>
+      <p:sp>
+        <p:nvSpPr>
+          <p:cNvPr id="42" name="TextBox 41">
+            <a:extLst>
+              <a:ext uri="{FF2B5EF4-FFF2-40B4-BE49-F238E27FC236}">
+                <a16:creationId xmlns:a16="http://schemas.microsoft.com/office/drawing/2014/main" id="{93B25815-FFE3-C0AD-710F-D5464D69980A}"/>
+              </a:ext>
+            </a:extLst>
+          </p:cNvPr>
+          <p:cNvSpPr txBox="1"/>
+          <p:nvPr/>
+        </p:nvSpPr>
+        <p:spPr>
+          <a:xfrm>
+            <a:off x="8074025" y="4861560"/>
+            <a:ext cx="1458595" cy="373051"/>
+          </a:xfrm>
+          <a:prstGeom prst="rect">
+            <a:avLst/>
+          </a:prstGeom>
+          <a:noFill/>
+        </p:spPr>
+        <p:txBody>
+          <a:bodyPr wrap="square" rtlCol="0">
+            <a:spAutoFit/>
+          </a:bodyPr>
+          <a:lstStyle/>
+          <a:p>
+            <a:pPr>
+              <a:lnSpc>
+                <a:spcPct val="105000"/>
+              </a:lnSpc>
+              <a:defRPr sz="975" b="0" i="0">
+                <a:solidFill>
+                  <a:srgbClr val="161616"/>
+                </a:solidFill>
+                <a:latin typeface="Arial"/>
+                <a:ea typeface="Arial"/>
+                <a:cs typeface="Arial"/>
+              </a:defRPr>
+            </a:pPr>
+            <a:r>
+              <a:rPr lang="en-US" sz="900" dirty="0">
+                <a:solidFill>
+                  <a:srgbClr val="161616"/>
+                </a:solidFill>
+                <a:latin typeface="Arial"/>
+                <a:ea typeface="Arial"/>
+                <a:cs typeface="Arial"/>
+              </a:rPr>
+              <a:t>mode-based save data</a:t>
+            </a:r>
+          </a:p>
+          <a:p>
+            <a:pPr>
+              <a:lnSpc>
+                <a:spcPct val="105000"/>
+              </a:lnSpc>
+              <a:defRPr sz="975" b="0" i="0">
+                <a:solidFill>
+                  <a:srgbClr val="161616"/>
+                </a:solidFill>
+                <a:latin typeface="Arial"/>
+                <a:ea typeface="Arial"/>
+                <a:cs typeface="Arial"/>
+              </a:defRPr>
+            </a:pPr>
+            <a:r>
+              <a:rPr lang="en-US" sz="900" dirty="0">
+                <a:solidFill>
+                  <a:srgbClr val="161616"/>
+                </a:solidFill>
+                <a:latin typeface="Arial"/>
+                <a:ea typeface="Arial"/>
+                <a:cs typeface="Arial"/>
+              </a:rPr>
+              <a:t>(e.g., settings, progress)</a:t>
+            </a:r>
           </a:p>
         </p:txBody>
       </p:sp>
@@ -16634,20 +16646,20 @@
 </file>
 
 <file path=customXml/item1.xml><?xml version="1.0" encoding="utf-8"?>
+<p:properties xmlns:p="http://schemas.microsoft.com/office/2006/metadata/properties" xmlns:xsi="http://www.w3.org/2001/XMLSchema-instance" xmlns:pc="http://schemas.microsoft.com/office/infopath/2007/PartnerControls">
+  <documentManagement>
+    <_activity xmlns="dc326360-c2d4-49e8-869f-22842a32ddef" xsi:nil="true"/>
+  </documentManagement>
+</p:properties>
+</file>
+
+<file path=customXml/item2.xml><?xml version="1.0" encoding="utf-8"?>
 <?mso-contentType ?>
 <FormTemplates xmlns="http://schemas.microsoft.com/sharepoint/v3/contenttype/forms">
   <Display>DocumentLibraryForm</Display>
   <Edit>DocumentLibraryForm</Edit>
   <New>DocumentLibraryForm</New>
 </FormTemplates>
-</file>
-
-<file path=customXml/item2.xml><?xml version="1.0" encoding="utf-8"?>
-<p:properties xmlns:p="http://schemas.microsoft.com/office/2006/metadata/properties" xmlns:xsi="http://www.w3.org/2001/XMLSchema-instance" xmlns:pc="http://schemas.microsoft.com/office/infopath/2007/PartnerControls">
-  <documentManagement>
-    <_activity xmlns="dc326360-c2d4-49e8-869f-22842a32ddef" xsi:nil="true"/>
-  </documentManagement>
-</p:properties>
 </file>
 
 <file path=customXml/item3.xml><?xml version="1.0" encoding="utf-8"?>
@@ -16807,14 +16819,6 @@
 </file>
 
 <file path=customXml/itemProps1.xml><?xml version="1.0" encoding="utf-8"?>
-<ds:datastoreItem xmlns:ds="http://schemas.openxmlformats.org/officeDocument/2006/customXml" ds:itemID="{0924664C-6B27-4E2D-8542-F0E19F5EC5C7}">
-  <ds:schemaRefs>
-    <ds:schemaRef ds:uri="http://schemas.microsoft.com/sharepoint/v3/contenttype/forms"/>
-  </ds:schemaRefs>
-</ds:datastoreItem>
-</file>
-
-<file path=customXml/itemProps2.xml><?xml version="1.0" encoding="utf-8"?>
 <ds:datastoreItem xmlns:ds="http://schemas.openxmlformats.org/officeDocument/2006/customXml" ds:itemID="{1BF7960A-A15D-48BD-93F3-24E058A5E7CF}">
   <ds:schemaRefs>
     <ds:schemaRef ds:uri="http://purl.org/dc/elements/1.1/"/>
@@ -16826,6 +16830,14 @@
     <ds:schemaRef ds:uri="http://schemas.openxmlformats.org/package/2006/metadata/core-properties"/>
     <ds:schemaRef ds:uri="dc326360-c2d4-49e8-869f-22842a32ddef"/>
     <ds:schemaRef ds:uri="http://purl.org/dc/terms/"/>
+  </ds:schemaRefs>
+</ds:datastoreItem>
+</file>
+
+<file path=customXml/itemProps2.xml><?xml version="1.0" encoding="utf-8"?>
+<ds:datastoreItem xmlns:ds="http://schemas.openxmlformats.org/officeDocument/2006/customXml" ds:itemID="{0924664C-6B27-4E2D-8542-F0E19F5EC5C7}">
+  <ds:schemaRefs>
+    <ds:schemaRef ds:uri="http://schemas.microsoft.com/sharepoint/v3/contenttype/forms"/>
   </ds:schemaRefs>
 </ds:datastoreItem>
 </file>

--- a/Presentation/QuizArena.pptx
+++ b/Presentation/QuizArena.pptx
@@ -15255,7 +15255,7 @@
                 <a:solidFill>
                   <a:srgbClr val="35D0BA"/>
                 </a:solidFill>
-                <a:hlinkClick r:id="rId3" action="ppaction://hlinkfile">
+                <a:hlinkClick r:id="rId4" action="ppaction://hlinkfile">
                   <a:extLst>
                     <a:ext uri="{A12FA001-AC4F-418D-AE19-62706E023703}">
                       <ahyp:hlinkClr xmlns:ahyp="http://schemas.microsoft.com/office/drawing/2018/hyperlinkcolor" val="tx"/>

--- a/Presentation/QuizArena.pptx
+++ b/Presentation/QuizArena.pptx
@@ -216,7 +216,7 @@
           <a:p>
             <a:fld id="{3B985EC4-34A2-4481-B882-DCBB7B1C39E1}" type="datetimeFigureOut">
               <a:rPr lang="LID4096" smtClean="0"/>
-              <a:t>08/07/2026</a:t>
+              <a:t>08/08/2026</a:t>
             </a:fld>
             <a:endParaRPr lang="LID4096"/>
           </a:p>
@@ -1200,7 +1200,7 @@
             <a:fld id="{B61BEF0D-F0BB-DE4B-95CE-6DB70DBA9567}" type="datetimeFigureOut">
               <a:rPr lang="en-US" smtClean="0"/>
               <a:pPr/>
-              <a:t>8/7/2026</a:t>
+              <a:t>8/8/2026</a:t>
             </a:fld>
             <a:endParaRPr lang="en-US"/>
           </a:p>
@@ -1371,7 +1371,7 @@
             <a:fld id="{B61BEF0D-F0BB-DE4B-95CE-6DB70DBA9567}" type="datetimeFigureOut">
               <a:rPr lang="en-US" smtClean="0"/>
               <a:pPr/>
-              <a:t>8/7/2026</a:t>
+              <a:t>8/8/2026</a:t>
             </a:fld>
             <a:endParaRPr lang="en-US"/>
           </a:p>
@@ -1552,7 +1552,7 @@
             <a:fld id="{B61BEF0D-F0BB-DE4B-95CE-6DB70DBA9567}" type="datetimeFigureOut">
               <a:rPr lang="en-US" smtClean="0"/>
               <a:pPr/>
-              <a:t>8/7/2026</a:t>
+              <a:t>8/8/2026</a:t>
             </a:fld>
             <a:endParaRPr lang="en-US"/>
           </a:p>
@@ -1793,7 +1793,7 @@
             <a:fld id="{B61BEF0D-F0BB-DE4B-95CE-6DB70DBA9567}" type="datetimeFigureOut">
               <a:rPr lang="en-US" smtClean="0"/>
               <a:pPr/>
-              <a:t>8/7/2026</a:t>
+              <a:t>8/8/2026</a:t>
             </a:fld>
             <a:endParaRPr lang="en-US"/>
           </a:p>
@@ -2041,7 +2041,7 @@
             <a:fld id="{B61BEF0D-F0BB-DE4B-95CE-6DB70DBA9567}" type="datetimeFigureOut">
               <a:rPr lang="en-US" smtClean="0"/>
               <a:pPr/>
-              <a:t>8/7/2026</a:t>
+              <a:t>8/8/2026</a:t>
             </a:fld>
             <a:endParaRPr lang="en-US"/>
           </a:p>
@@ -2273,7 +2273,7 @@
             <a:fld id="{B61BEF0D-F0BB-DE4B-95CE-6DB70DBA9567}" type="datetimeFigureOut">
               <a:rPr lang="en-US" smtClean="0"/>
               <a:pPr/>
-              <a:t>8/7/2026</a:t>
+              <a:t>8/8/2026</a:t>
             </a:fld>
             <a:endParaRPr lang="en-US"/>
           </a:p>
@@ -2640,7 +2640,7 @@
             <a:fld id="{B61BEF0D-F0BB-DE4B-95CE-6DB70DBA9567}" type="datetimeFigureOut">
               <a:rPr lang="en-US" smtClean="0"/>
               <a:pPr/>
-              <a:t>8/7/2026</a:t>
+              <a:t>8/8/2026</a:t>
             </a:fld>
             <a:endParaRPr lang="en-US"/>
           </a:p>
@@ -2760,7 +2760,7 @@
             <a:fld id="{B61BEF0D-F0BB-DE4B-95CE-6DB70DBA9567}" type="datetimeFigureOut">
               <a:rPr lang="en-US" smtClean="0"/>
               <a:pPr/>
-              <a:t>8/7/2026</a:t>
+              <a:t>8/8/2026</a:t>
             </a:fld>
             <a:endParaRPr lang="en-US"/>
           </a:p>
@@ -2858,7 +2858,7 @@
             <a:fld id="{B61BEF0D-F0BB-DE4B-95CE-6DB70DBA9567}" type="datetimeFigureOut">
               <a:rPr lang="en-US" smtClean="0"/>
               <a:pPr/>
-              <a:t>8/7/2026</a:t>
+              <a:t>8/8/2026</a:t>
             </a:fld>
             <a:endParaRPr lang="en-US"/>
           </a:p>
@@ -3136,7 +3136,7 @@
             <a:fld id="{B61BEF0D-F0BB-DE4B-95CE-6DB70DBA9567}" type="datetimeFigureOut">
               <a:rPr lang="en-US" smtClean="0"/>
               <a:pPr/>
-              <a:t>8/7/2026</a:t>
+              <a:t>8/8/2026</a:t>
             </a:fld>
             <a:endParaRPr lang="en-US"/>
           </a:p>
@@ -3394,7 +3394,7 @@
             <a:fld id="{B61BEF0D-F0BB-DE4B-95CE-6DB70DBA9567}" type="datetimeFigureOut">
               <a:rPr lang="en-US" smtClean="0"/>
               <a:pPr/>
-              <a:t>8/7/2026</a:t>
+              <a:t>8/8/2026</a:t>
             </a:fld>
             <a:endParaRPr lang="en-US"/>
           </a:p>
@@ -3608,7 +3608,7 @@
             <a:fld id="{B61BEF0D-F0BB-DE4B-95CE-6DB70DBA9567}" type="datetimeFigureOut">
               <a:rPr lang="en-US" smtClean="0"/>
               <a:pPr/>
-              <a:t>8/7/2026</a:t>
+              <a:t>8/8/2026</a:t>
             </a:fld>
             <a:endParaRPr lang="en-US"/>
           </a:p>
@@ -13242,10 +13242,10 @@
       </p:sp>
       <p:pic>
         <p:nvPicPr>
-          <p:cNvPr id="3" name="Picture 2">
+          <p:cNvPr id="6" name="Picture 5">
             <a:extLst>
               <a:ext uri="{FF2B5EF4-FFF2-40B4-BE49-F238E27FC236}">
-                <a16:creationId xmlns:a16="http://schemas.microsoft.com/office/drawing/2014/main" id="{45E7F1B8-2E97-9970-7F23-89A068C3BDAF}"/>
+                <a16:creationId xmlns:a16="http://schemas.microsoft.com/office/drawing/2014/main" id="{D2EC568F-78B7-79B5-0AFA-948822F72CD0}"/>
               </a:ext>
             </a:extLst>
           </p:cNvPr>
@@ -13268,8 +13268,8 @@
         </p:blipFill>
         <p:spPr>
           <a:xfrm>
-            <a:off x="4169251" y="48131"/>
-            <a:ext cx="7968477" cy="6771836"/>
+            <a:off x="4199697" y="0"/>
+            <a:ext cx="7992303" cy="6858000"/>
           </a:xfrm>
           <a:prstGeom prst="rect">
             <a:avLst/>
@@ -16646,23 +16646,6 @@
 </file>
 
 <file path=customXml/item1.xml><?xml version="1.0" encoding="utf-8"?>
-<p:properties xmlns:p="http://schemas.microsoft.com/office/2006/metadata/properties" xmlns:xsi="http://www.w3.org/2001/XMLSchema-instance" xmlns:pc="http://schemas.microsoft.com/office/infopath/2007/PartnerControls">
-  <documentManagement>
-    <_activity xmlns="dc326360-c2d4-49e8-869f-22842a32ddef" xsi:nil="true"/>
-  </documentManagement>
-</p:properties>
-</file>
-
-<file path=customXml/item2.xml><?xml version="1.0" encoding="utf-8"?>
-<?mso-contentType ?>
-<FormTemplates xmlns="http://schemas.microsoft.com/sharepoint/v3/contenttype/forms">
-  <Display>DocumentLibraryForm</Display>
-  <Edit>DocumentLibraryForm</Edit>
-  <New>DocumentLibraryForm</New>
-</FormTemplates>
-</file>
-
-<file path=customXml/item3.xml><?xml version="1.0" encoding="utf-8"?>
 <ct:contentTypeSchema xmlns:ct="http://schemas.microsoft.com/office/2006/metadata/contentType" xmlns:ma="http://schemas.microsoft.com/office/2006/metadata/properties/metaAttributes" ct:_="" ma:_="" ma:contentTypeName="Document" ma:contentTypeID="0x01010045CDE2E39EB08043806489AFE8278BEA" ma:contentTypeVersion="6" ma:contentTypeDescription="Create a new document." ma:contentTypeScope="" ma:versionID="4969b5e9fe7db14ed7dbe2ed9e3d23f3">
   <xsd:schema xmlns:xsd="http://www.w3.org/2001/XMLSchema" xmlns:xs="http://www.w3.org/2001/XMLSchema" xmlns:p="http://schemas.microsoft.com/office/2006/metadata/properties" xmlns:ns3="dc326360-c2d4-49e8-869f-22842a32ddef" targetNamespace="http://schemas.microsoft.com/office/2006/metadata/properties" ma:root="true" ma:fieldsID="fcfe44127cbd787e8f5f1aa79a508a57" ns3:_="">
     <xsd:import namespace="dc326360-c2d4-49e8-869f-22842a32ddef"/>
@@ -16818,31 +16801,24 @@
 </ct:contentTypeSchema>
 </file>
 
-<file path=customXml/itemProps1.xml><?xml version="1.0" encoding="utf-8"?>
-<ds:datastoreItem xmlns:ds="http://schemas.openxmlformats.org/officeDocument/2006/customXml" ds:itemID="{1BF7960A-A15D-48BD-93F3-24E058A5E7CF}">
-  <ds:schemaRefs>
-    <ds:schemaRef ds:uri="http://purl.org/dc/elements/1.1/"/>
-    <ds:schemaRef ds:uri="http://www.w3.org/XML/1998/namespace"/>
-    <ds:schemaRef ds:uri="http://schemas.microsoft.com/office/2006/documentManagement/types"/>
-    <ds:schemaRef ds:uri="http://purl.org/dc/dcmitype/"/>
-    <ds:schemaRef ds:uri="http://schemas.microsoft.com/office/2006/metadata/properties"/>
-    <ds:schemaRef ds:uri="http://schemas.microsoft.com/office/infopath/2007/PartnerControls"/>
-    <ds:schemaRef ds:uri="http://schemas.openxmlformats.org/package/2006/metadata/core-properties"/>
-    <ds:schemaRef ds:uri="dc326360-c2d4-49e8-869f-22842a32ddef"/>
-    <ds:schemaRef ds:uri="http://purl.org/dc/terms/"/>
-  </ds:schemaRefs>
-</ds:datastoreItem>
+<file path=customXml/item2.xml><?xml version="1.0" encoding="utf-8"?>
+<?mso-contentType ?>
+<FormTemplates xmlns="http://schemas.microsoft.com/sharepoint/v3/contenttype/forms">
+  <Display>DocumentLibraryForm</Display>
+  <Edit>DocumentLibraryForm</Edit>
+  <New>DocumentLibraryForm</New>
+</FormTemplates>
 </file>
 
-<file path=customXml/itemProps2.xml><?xml version="1.0" encoding="utf-8"?>
-<ds:datastoreItem xmlns:ds="http://schemas.openxmlformats.org/officeDocument/2006/customXml" ds:itemID="{0924664C-6B27-4E2D-8542-F0E19F5EC5C7}">
-  <ds:schemaRefs>
-    <ds:schemaRef ds:uri="http://schemas.microsoft.com/sharepoint/v3/contenttype/forms"/>
-  </ds:schemaRefs>
-</ds:datastoreItem>
+<file path=customXml/item3.xml><?xml version="1.0" encoding="utf-8"?>
+<p:properties xmlns:p="http://schemas.microsoft.com/office/2006/metadata/properties" xmlns:xsi="http://www.w3.org/2001/XMLSchema-instance" xmlns:pc="http://schemas.microsoft.com/office/infopath/2007/PartnerControls">
+  <documentManagement>
+    <_activity xmlns="dc326360-c2d4-49e8-869f-22842a32ddef" xsi:nil="true"/>
+  </documentManagement>
+</p:properties>
 </file>
 
-<file path=customXml/itemProps3.xml><?xml version="1.0" encoding="utf-8"?>
+<file path=customXml/itemProps1.xml><?xml version="1.0" encoding="utf-8"?>
 <ds:datastoreItem xmlns:ds="http://schemas.openxmlformats.org/officeDocument/2006/customXml" ds:itemID="{E2544F67-14EE-49DB-BD06-C16724A0EEBB}">
   <ds:schemaRefs>
     <ds:schemaRef ds:uri="http://schemas.microsoft.com/office/2006/metadata/contentType"/>
@@ -16858,4 +16834,28 @@
     <ds:schemaRef ds:uri="http://schemas.microsoft.com/internal/obd"/>
   </ds:schemaRefs>
 </ds:datastoreItem>
+</file>
+
+<file path=customXml/itemProps2.xml><?xml version="1.0" encoding="utf-8"?>
+<ds:datastoreItem xmlns:ds="http://schemas.openxmlformats.org/officeDocument/2006/customXml" ds:itemID="{0924664C-6B27-4E2D-8542-F0E19F5EC5C7}">
+  <ds:schemaRefs>
+    <ds:schemaRef ds:uri="http://schemas.microsoft.com/sharepoint/v3/contenttype/forms"/>
+  </ds:schemaRefs>
+</ds:datastoreItem>
+</file>
+
+<file path=customXml/itemProps3.xml><?xml version="1.0" encoding="utf-8"?>
+<ds:datastoreItem xmlns:ds="http://schemas.openxmlformats.org/officeDocument/2006/customXml" ds:itemID="{1BF7960A-A15D-48BD-93F3-24E058A5E7CF}">
+  <ds:schemaRefs>
+    <ds:schemaRef ds:uri="http://purl.org/dc/elements/1.1/"/>
+    <ds:schemaRef ds:uri="http://www.w3.org/XML/1998/namespace"/>
+    <ds:schemaRef ds:uri="http://schemas.microsoft.com/office/2006/documentManagement/types"/>
+    <ds:schemaRef ds:uri="http://purl.org/dc/dcmitype/"/>
+    <ds:schemaRef ds:uri="http://schemas.microsoft.com/office/2006/metadata/properties"/>
+    <ds:schemaRef ds:uri="http://schemas.microsoft.com/office/infopath/2007/PartnerControls"/>
+    <ds:schemaRef ds:uri="http://schemas.openxmlformats.org/package/2006/metadata/core-properties"/>
+    <ds:schemaRef ds:uri="dc326360-c2d4-49e8-869f-22842a32ddef"/>
+    <ds:schemaRef ds:uri="http://purl.org/dc/terms/"/>
+  </ds:schemaRefs>
+</ds:datastoreItem>
 </file>